--- a/outputs/ophthalmology-batch-20261011/ok_fitting/algorithm_editable.pptx
+++ b/outputs/ophthalmology-batch-20261011/ok_fitting/algorithm_editable.pptx
@@ -518,7 +518,7 @@
           <a:p/>
           <a:p>
             <a:r>
-              <a:t>ok_fitting-02 明确数值禁忌：8岁以下儿童；角膜内皮细胞密度少于2 000个/mm²，为原文禁忌证。</a:t>
+              <a:t>ok_fitting-02 明确数值禁忌：8岁以下儿童（原文表述，8岁整的边界未单独说明）；角膜内皮细胞密度少于2 000个/mm²，为原文禁忌证。</a:t>
             </a:r>
           </a:p>
           <a:p>
@@ -3971,7 +3971,7 @@
       </p:sp>
       <p:sp>
         <p:nvSpPr>
-          <p:cNvPr id="7" name="曲率39.00～48.00 D；&lt;8岁/内皮&lt;2 000等 → 非常规验配，特殊需求按原文专门评估。"/>
+          <p:cNvPr id="7" name="曲率39.00～48.00 D；8岁以下/内皮密度&lt;2 000个/mm²等 → 非常规验配，特殊需求"/>
           <p:cNvSpPr txBox="1"/>
           <p:nvPr/>
         </p:nvSpPr>
@@ -4011,7 +4011,7 @@
                 <a:ea typeface="Microsoft YaHei"/>
                 <a:cs typeface="Microsoft YaHei"/>
               </a:rPr>
-              <a:t>曲率39.00～48.00 D；&lt;8岁/内皮&lt;2 000等 → 非常规验</a:t>
+              <a:t>曲率39.00～48.00 D；8岁以下/内皮密度&lt;2 000个/</a:t>
             </a:r>
           </a:p>
           <a:p>
@@ -4035,7 +4035,7 @@
                 <a:ea typeface="Microsoft YaHei"/>
                 <a:cs typeface="Microsoft YaHei"/>
               </a:rPr>
-              <a:t>配，特殊需求按原文专门评估。</a:t>
+              <a:t>mm²等 → 非常规验配，特殊需求按原文专门评估。</a:t>
             </a:r>
           </a:p>
         </p:txBody>
